--- a/tests/fixtures/corpus/off-canvas-01.pptx
+++ b/tests/fixtures/corpus/off-canvas-01.pptx
@@ -51,7 +51,7 @@
         </p:nvSpPr>
         <p:spPr>
           <a:xfrm>
-            <a:off x="11500000" y="1828800"/>
+            <a:off x="11340000" y="1828800"/>
             <a:ext cx="2000000" cy="3200400"/>
           </a:xfrm>
         </p:spPr>
